--- a/apps/resources/bundled_files/4-klass-million-ichinde-sabak.pptx
+++ b/apps/resources/bundled_files/4-klass-million-ichinde-sabak.pptx
@@ -5196,7 +5196,7 @@
                 </a:solidFill>
                 <a:latin typeface="PT Sans"/>
               </a:rPr>
-              <a:t>4-класс · Математика</a:t>
+              <a:t/>
             </a:r>
           </a:p>
         </p:txBody>
@@ -5688,7 +5688,7 @@
                 </a:solidFill>
                 <a:latin typeface="PT Sans"/>
               </a:rPr>
-              <a:t>4-класс ›</a:t>
+              <a:t/>
             </a:r>
           </a:p>
           <a:p>
@@ -6637,7 +6637,7 @@
                 </a:solidFill>
                 <a:latin typeface="PT Sans"/>
               </a:rPr>
-              <a:t>4-класс ›</a:t>
+              <a:t/>
             </a:r>
           </a:p>
           <a:p>
@@ -8845,7 +8845,7 @@
                 </a:solidFill>
                 <a:latin typeface="PT Sans"/>
               </a:rPr>
-              <a:t>4-класс ›</a:t>
+              <a:t/>
             </a:r>
           </a:p>
           <a:p>
@@ -11874,7 +11874,7 @@
                 </a:solidFill>
                 <a:latin typeface="PT Sans"/>
               </a:rPr>
-              <a:t>4-класс ›</a:t>
+              <a:t/>
             </a:r>
           </a:p>
           <a:p>
@@ -13204,7 +13204,7 @@
                 </a:solidFill>
                 <a:latin typeface="PT Sans"/>
               </a:rPr>
-              <a:t>4-класс ›</a:t>
+              <a:t/>
             </a:r>
           </a:p>
           <a:p>
@@ -13877,7 +13877,7 @@
                 </a:solidFill>
                 <a:latin typeface="PT Sans"/>
               </a:rPr>
-              <a:t>4-класс ›</a:t>
+              <a:t/>
             </a:r>
           </a:p>
           <a:p>
@@ -14706,7 +14706,7 @@
                 </a:solidFill>
                 <a:latin typeface="PT Sans"/>
               </a:rPr>
-              <a:t>4-класс ›</a:t>
+              <a:t/>
             </a:r>
           </a:p>
           <a:p>
@@ -16294,7 +16294,7 @@
                 </a:solidFill>
                 <a:latin typeface="PT Sans"/>
               </a:rPr>
-              <a:t>4-класс ›</a:t>
+              <a:t/>
             </a:r>
           </a:p>
           <a:p>
@@ -17378,7 +17378,7 @@
                 </a:solidFill>
                 <a:latin typeface="PT Sans"/>
               </a:rPr>
-              <a:t>4-класс ›</a:t>
+              <a:t/>
             </a:r>
           </a:p>
           <a:p>
@@ -18908,7 +18908,7 @@
                 </a:solidFill>
                 <a:latin typeface="PT Sans"/>
               </a:rPr>
-              <a:t>4-класс ›</a:t>
+              <a:t/>
             </a:r>
           </a:p>
           <a:p>
@@ -20777,7 +20777,7 @@
                 </a:solidFill>
                 <a:latin typeface="PT Sans"/>
               </a:rPr>
-              <a:t>4-класс ›</a:t>
+              <a:t/>
             </a:r>
           </a:p>
           <a:p>
@@ -22054,7 +22054,7 @@
                 </a:solidFill>
                 <a:latin typeface="PT Sans"/>
               </a:rPr>
-              <a:t>4-класс ›</a:t>
+              <a:t/>
             </a:r>
           </a:p>
           <a:p>
@@ -23482,7 +23482,7 @@
                 </a:solidFill>
                 <a:latin typeface="PT Sans"/>
               </a:rPr>
-              <a:t>4-класс ›</a:t>
+              <a:t/>
             </a:r>
           </a:p>
           <a:p>
@@ -24938,7 +24938,7 @@
                 </a:solidFill>
                 <a:latin typeface="PT Sans"/>
               </a:rPr>
-              <a:t>4-класс ›</a:t>
+              <a:t/>
             </a:r>
           </a:p>
           <a:p>
@@ -26117,7 +26117,7 @@
                 </a:solidFill>
                 <a:latin typeface="PT Sans"/>
               </a:rPr>
-              <a:t>4-класс ›</a:t>
+              <a:t/>
             </a:r>
           </a:p>
           <a:p>
@@ -26917,7 +26917,7 @@
                 </a:solidFill>
                 <a:latin typeface="PT Sans"/>
               </a:rPr>
-              <a:t>4-класс ›</a:t>
+              <a:t/>
             </a:r>
           </a:p>
           <a:p>
@@ -27758,7 +27758,7 @@
                 </a:solidFill>
                 <a:latin typeface="PT Sans"/>
               </a:rPr>
-              <a:t>4-класс ›</a:t>
+              <a:t/>
             </a:r>
           </a:p>
           <a:p>
@@ -28707,7 +28707,7 @@
                 </a:solidFill>
                 <a:latin typeface="PT Sans"/>
               </a:rPr>
-              <a:t>4-класс ›</a:t>
+              <a:t/>
             </a:r>
           </a:p>
           <a:p>
@@ -30161,7 +30161,7 @@
                 </a:solidFill>
                 <a:latin typeface="PT Sans"/>
               </a:rPr>
-              <a:t>4-класс ›</a:t>
+              <a:t/>
             </a:r>
           </a:p>
           <a:p>
@@ -30907,7 +30907,7 @@
                 </a:solidFill>
                 <a:latin typeface="PT Sans"/>
               </a:rPr>
-              <a:t>4-класс ›</a:t>
+              <a:t/>
             </a:r>
           </a:p>
           <a:p>
@@ -31715,7 +31715,7 @@
                 </a:solidFill>
                 <a:latin typeface="PT Sans"/>
               </a:rPr>
-              <a:t>4-класс ›</a:t>
+              <a:t/>
             </a:r>
           </a:p>
           <a:p>
@@ -32906,7 +32906,7 @@
                 </a:solidFill>
                 <a:latin typeface="PT Sans"/>
               </a:rPr>
-              <a:t>4-класс ›</a:t>
+              <a:t/>
             </a:r>
           </a:p>
           <a:p>
@@ -34101,7 +34101,7 @@
                 </a:solidFill>
                 <a:latin typeface="PT Sans"/>
               </a:rPr>
-              <a:t>4-класс ›</a:t>
+              <a:t/>
             </a:r>
           </a:p>
           <a:p>
@@ -34282,7 +34282,7 @@
                 </a:solidFill>
                 <a:latin typeface="PT Sans"/>
               </a:rPr>
-              <a:t>2-класс</a:t>
+              <a:t/>
             </a:r>
           </a:p>
         </p:txBody>
@@ -34462,7 +34462,7 @@
                 </a:solidFill>
                 <a:latin typeface="PT Sans"/>
               </a:rPr>
-              <a:t>3-класс</a:t>
+              <a:t/>
             </a:r>
           </a:p>
         </p:txBody>
@@ -34623,7 +34623,7 @@
                 </a:solidFill>
                 <a:latin typeface="PT Sans"/>
               </a:rPr>
-              <a:t>4-класс</a:t>
+              <a:t/>
             </a:r>
           </a:p>
         </p:txBody>
@@ -34859,7 +34859,7 @@
                 </a:solidFill>
                 <a:latin typeface="PT Sans"/>
               </a:rPr>
-              <a:t>5-класс</a:t>
+              <a:t/>
             </a:r>
           </a:p>
         </p:txBody>
@@ -35279,7 +35279,7 @@
                 </a:solidFill>
                 <a:latin typeface="PT Sans"/>
               </a:rPr>
-              <a:t>4-класс ›</a:t>
+              <a:t/>
             </a:r>
           </a:p>
           <a:p>
@@ -36427,7 +36427,7 @@
                 </a:solidFill>
                 <a:latin typeface="PT Sans"/>
               </a:rPr>
-              <a:t>4-класс ›</a:t>
+              <a:t/>
             </a:r>
           </a:p>
           <a:p>

--- a/apps/resources/bundled_files/4-klass-million-ichinde-sabak.pptx
+++ b/apps/resources/bundled_files/4-klass-million-ichinde-sabak.pptx
@@ -1582,7 +1582,7 @@
           <a:lstStyle/>
           <a:p>
             <a:r>
-              <a:t>Ой жүгүртүү маданияты (Wenxi Lee, 2.6).</a:t>
+              <a:t>Ой жүгүртүү маданияты (Wenxi Lee, 2,6).</a:t>
             </a:r>
           </a:p>
         </p:txBody>
